--- a/report/data_cluster/contribution_slide.pptx
+++ b/report/data_cluster/contribution_slide.pptx
@@ -3097,7 +3097,7 @@
         <p:spPr>
           <a:xfrm>
             <a:off x="502920" y="219456"/>
-            <a:ext cx="11247120" cy="566928"/>
+            <a:ext cx="11247120" cy="914400"/>
           </a:xfrm>
           <a:prstGeom prst="rect">
             <a:avLst/>
@@ -3110,10 +3110,13 @@
           </a:bodyPr>
           <a:lstStyle/>
           <a:p>
-            <a:pPr algn="l">
+            <a:pPr>
               <a:lnSpc>
-                <a:spcPts val="3584"/>
+                <a:spcPts val="3640"/>
               </a:lnSpc>
+              <a:spcAft>
+                <a:spcPts val="0"/>
+              </a:spcAft>
             </a:pPr>
             <a:r>
               <a:rPr sz="2800" b="1">
@@ -3135,46 +3138,7 @@
         </p:nvSpPr>
         <p:spPr>
           <a:xfrm>
-            <a:off x="822960" y="1280160"/>
-            <a:ext cx="10789920" cy="457200"/>
-          </a:xfrm>
-          <a:prstGeom prst="rect">
-            <a:avLst/>
-          </a:prstGeom>
-          <a:noFill/>
-        </p:spPr>
-        <p:txBody>
-          <a:bodyPr wrap="square" lIns="0" rIns="0" tIns="0" bIns="0">
-            <a:spAutoFit/>
-          </a:bodyPr>
-          <a:lstStyle/>
-          <a:p>
-            <a:pPr algn="l">
-              <a:lnSpc>
-                <a:spcPts val="2816"/>
-              </a:lnSpc>
-            </a:pPr>
-            <a:r>
-              <a:rPr sz="2200" b="1">
-                <a:solidFill>
-                  <a:srgbClr val="2D6CB5"/>
-                </a:solidFill>
-                <a:latin typeface="Garamond"/>
-              </a:rPr>
-              <a:t>1.  A yearly series</a:t>
-            </a:r>
-          </a:p>
-        </p:txBody>
-      </p:sp>
-      <p:sp>
-        <p:nvSpPr>
-          <p:cNvPr id="4" name="TextBox 3"/>
-          <p:cNvSpPr txBox="1"/>
-          <p:nvPr/>
-        </p:nvSpPr>
-        <p:spPr>
-          <a:xfrm>
-            <a:off x="822960" y="1783080"/>
+            <a:off x="822960" y="1463040"/>
             <a:ext cx="10789920" cy="914400"/>
           </a:xfrm>
           <a:prstGeom prst="rect">
@@ -3188,71 +3152,35 @@
           </a:bodyPr>
           <a:lstStyle/>
           <a:p>
-            <a:pPr algn="l">
+            <a:pPr>
               <a:lnSpc>
-                <a:spcPts val="2432"/>
+                <a:spcPts val="2730"/>
               </a:lnSpc>
+              <a:spcAft>
+                <a:spcPts val="0"/>
+              </a:spcAft>
             </a:pPr>
             <a:r>
-              <a:rPr sz="1900" b="0">
+              <a:rPr sz="2100" b="0">
                 <a:solidFill>
                   <a:srgbClr val="212529"/>
                 </a:solidFill>
                 <a:latin typeface="Garamond"/>
               </a:rPr>
-              <a:t>A continuous, yearly measure of teacher attrition in the United States, built from public survey microdata, where the official number appears only once every several years.</a:t>
-            </a:r>
-          </a:p>
-        </p:txBody>
-      </p:sp>
-      <p:sp>
-        <p:nvSpPr>
-          <p:cNvPr id="5" name="TextBox 4"/>
+              <a:t>We build one of the longest continuous measures of teacher attrition in the United States: twenty-eight consecutive years, 1998–2025.</a:t>
+            </a:r>
+          </a:p>
+        </p:txBody>
+      </p:sp>
+      <p:sp>
+        <p:nvSpPr>
+          <p:cNvPr id="4" name="TextBox 3"/>
           <p:cNvSpPr txBox="1"/>
           <p:nvPr/>
         </p:nvSpPr>
         <p:spPr>
           <a:xfrm>
-            <a:off x="822960" y="2880360"/>
-            <a:ext cx="10789920" cy="457200"/>
-          </a:xfrm>
-          <a:prstGeom prst="rect">
-            <a:avLst/>
-          </a:prstGeom>
-          <a:noFill/>
-        </p:spPr>
-        <p:txBody>
-          <a:bodyPr wrap="square" lIns="0" rIns="0" tIns="0" bIns="0">
-            <a:spAutoFit/>
-          </a:bodyPr>
-          <a:lstStyle/>
-          <a:p>
-            <a:pPr algn="l">
-              <a:lnSpc>
-                <a:spcPts val="2816"/>
-              </a:lnSpc>
-            </a:pPr>
-            <a:r>
-              <a:rPr sz="2200" b="1">
-                <a:solidFill>
-                  <a:srgbClr val="2D6CB5"/>
-                </a:solidFill>
-                <a:latin typeface="Garamond"/>
-              </a:rPr>
-              <a:t>2.  A user’s guide</a:t>
-            </a:r>
-          </a:p>
-        </p:txBody>
-      </p:sp>
-      <p:sp>
-        <p:nvSpPr>
-          <p:cNvPr id="6" name="TextBox 5"/>
-          <p:cNvSpPr txBox="1"/>
-          <p:nvPr/>
-        </p:nvSpPr>
-        <p:spPr>
-          <a:xfrm>
-            <a:off x="822960" y="3383280"/>
+            <a:off x="822960" y="2743200"/>
             <a:ext cx="10789920" cy="914400"/>
           </a:xfrm>
           <a:prstGeom prst="rect">
@@ -3266,136 +3194,114 @@
           </a:bodyPr>
           <a:lstStyle/>
           <a:p>
-            <a:pPr algn="l">
+            <a:pPr>
               <a:lnSpc>
-                <a:spcPts val="2432"/>
+                <a:spcPts val="2730"/>
               </a:lnSpc>
+              <a:spcAft>
+                <a:spcPts val="2800"/>
+              </a:spcAft>
             </a:pPr>
             <a:r>
-              <a:rPr sz="1900" b="0">
+              <a:rPr sz="2100" b="1">
+                <a:solidFill>
+                  <a:srgbClr val="2D6CB5"/>
+                </a:solidFill>
+                <a:latin typeface="Garamond"/>
+              </a:rPr>
+              <a:t>▪  </a:t>
+            </a:r>
+            <a:r>
+              <a:rPr sz="2100" b="1">
+                <a:solidFill>
+                  <a:srgbClr val="102D5E"/>
+                </a:solidFill>
+                <a:latin typeface="Garamond"/>
+              </a:rPr>
+              <a:t>One source.  </a:t>
+            </a:r>
+            <a:r>
+              <a:rPr sz="2100" b="0">
                 <a:solidFill>
                   <a:srgbClr val="212529"/>
                 </a:solidFill>
                 <a:latin typeface="Garamond"/>
               </a:rPr>
-              <a:t>A methodological discussion of how to measure attrition with a labour force survey: how to define a leaver, which assumptions each choice carries, and how the results land on the official benchmark.</a:t>
-            </a:r>
-          </a:p>
-        </p:txBody>
-      </p:sp>
-      <p:sp>
-        <p:nvSpPr>
-          <p:cNvPr id="7" name="TextBox 6"/>
-          <p:cNvSpPr txBox="1"/>
-          <p:nvPr/>
-        </p:nvSpPr>
-        <p:spPr>
-          <a:xfrm>
-            <a:off x="822960" y="4480560"/>
-            <a:ext cx="10789920" cy="457200"/>
-          </a:xfrm>
-          <a:prstGeom prst="rect">
-            <a:avLst/>
-          </a:prstGeom>
-          <a:noFill/>
-        </p:spPr>
-        <p:txBody>
-          <a:bodyPr wrap="square" lIns="0" rIns="0" tIns="0" bIns="0">
-            <a:spAutoFit/>
-          </a:bodyPr>
-          <a:lstStyle/>
-          <a:p>
-            <a:pPr algn="l">
+              <a:t>Every number comes from the same instrument — the CPS March supplement — under a single definition, with no splicing of surveys.</a:t>
+            </a:r>
+          </a:p>
+          <a:p>
+            <a:pPr>
               <a:lnSpc>
-                <a:spcPts val="2816"/>
+                <a:spcPts val="2730"/>
               </a:lnSpc>
+              <a:spcAft>
+                <a:spcPts val="2800"/>
+              </a:spcAft>
             </a:pPr>
             <a:r>
-              <a:rPr sz="2200" b="1">
+              <a:rPr sz="2100" b="1">
                 <a:solidFill>
                   <a:srgbClr val="2D6CB5"/>
                 </a:solidFill>
                 <a:latin typeface="Garamond"/>
               </a:rPr>
-              <a:t>3.  Who leaves, and why</a:t>
-            </a:r>
-          </a:p>
-        </p:txBody>
-      </p:sp>
-      <p:sp>
-        <p:nvSpPr>
-          <p:cNvPr id="8" name="TextBox 7"/>
-          <p:cNvSpPr txBox="1"/>
-          <p:nvPr/>
-        </p:nvSpPr>
-        <p:spPr>
-          <a:xfrm>
-            <a:off x="822960" y="4983480"/>
-            <a:ext cx="10789920" cy="1097280"/>
-          </a:xfrm>
-          <a:prstGeom prst="rect">
-            <a:avLst/>
-          </a:prstGeom>
-          <a:noFill/>
-        </p:spPr>
-        <p:txBody>
-          <a:bodyPr wrap="square" lIns="0" rIns="0" tIns="0" bIns="0">
-            <a:spAutoFit/>
-          </a:bodyPr>
-          <a:lstStyle/>
-          <a:p>
-            <a:pPr algn="l">
-              <a:lnSpc>
-                <a:spcPts val="2432"/>
-              </a:lnSpc>
-            </a:pPr>
-            <a:r>
-              <a:rPr sz="1900" b="0">
+              <a:t>▪  </a:t>
+            </a:r>
+            <a:r>
+              <a:rPr sz="2100" b="1">
+                <a:solidFill>
+                  <a:srgbClr val="102D5E"/>
+                </a:solidFill>
+                <a:latin typeface="Garamond"/>
+              </a:rPr>
+              <a:t>No gaps.  </a:t>
+            </a:r>
+            <a:r>
+              <a:rPr sz="2100" b="0">
                 <a:solidFill>
                   <a:srgbClr val="212529"/>
                 </a:solidFill>
                 <a:latin typeface="Garamond"/>
               </a:rPr>
-              <a:t>The composition of the flow, where leavers go, and what correlates with leaving: job security, pay, family, health and the life cycle.</a:t>
-            </a:r>
-          </a:p>
-        </p:txBody>
-      </p:sp>
-      <p:sp>
-        <p:nvSpPr>
-          <p:cNvPr id="9" name="TextBox 8"/>
-          <p:cNvSpPr txBox="1"/>
-          <p:nvPr/>
-        </p:nvSpPr>
-        <p:spPr>
-          <a:xfrm>
-            <a:off x="11384280" y="6446520"/>
-            <a:ext cx="640080" cy="292608"/>
-          </a:xfrm>
-          <a:prstGeom prst="rect">
-            <a:avLst/>
-          </a:prstGeom>
-          <a:noFill/>
-        </p:spPr>
-        <p:txBody>
-          <a:bodyPr wrap="square" lIns="0" rIns="0" tIns="0" bIns="0">
-            <a:spAutoFit/>
-          </a:bodyPr>
-          <a:lstStyle/>
-          <a:p>
-            <a:pPr algn="r">
+              <a:t>Twenty-eight consecutive annual observations; the official benchmark measures once every four or more years.</a:t>
+            </a:r>
+          </a:p>
+          <a:p>
+            <a:pPr>
               <a:lnSpc>
-                <a:spcPts val="1408"/>
+                <a:spcPts val="2730"/>
               </a:lnSpc>
+              <a:spcAft>
+                <a:spcPts val="2800"/>
+              </a:spcAft>
             </a:pPr>
             <a:r>
-              <a:rPr sz="1100" b="0">
+              <a:rPr sz="2100" b="1">
                 <a:solidFill>
-                  <a:srgbClr val="6B7480"/>
+                  <a:srgbClr val="2D6CB5"/>
                 </a:solidFill>
                 <a:latin typeface="Garamond"/>
               </a:rPr>
-              <a:t>3</a:t>
+              <a:t>▪  </a:t>
+            </a:r>
+            <a:r>
+              <a:rPr sz="2100" b="1">
+                <a:solidFill>
+                  <a:srgbClr val="102D5E"/>
+                </a:solidFill>
+                <a:latin typeface="Garamond"/>
+              </a:rPr>
+              <a:t>Beyond the rate.  </a:t>
+            </a:r>
+            <a:r>
+              <a:rPr sz="2100" b="0">
+                <a:solidFill>
+                  <a:srgbClr val="212529"/>
+                </a:solidFill>
+                <a:latin typeface="Garamond"/>
+              </a:rPr>
+              <a:t>The same files show who leaves, where they go, what leaving pays, who returns, and what moves the rate.</a:t>
             </a:r>
           </a:p>
         </p:txBody>

--- a/report/data_cluster/contribution_slide.pptx
+++ b/report/data_cluster/contribution_slide.pptx
@@ -3105,7 +3105,7 @@
           <a:noFill/>
         </p:spPr>
         <p:txBody>
-          <a:bodyPr wrap="square" lIns="0" rIns="0" tIns="0" bIns="0">
+          <a:bodyPr wrap="square">
             <a:spAutoFit/>
           </a:bodyPr>
           <a:lstStyle/>
@@ -3138,7 +3138,7 @@
         </p:nvSpPr>
         <p:spPr>
           <a:xfrm>
-            <a:off x="822960" y="1463040"/>
+            <a:off x="822960" y="1554480"/>
             <a:ext cx="10789920" cy="914400"/>
           </a:xfrm>
           <a:prstGeom prst="rect">
@@ -3147,7 +3147,7 @@
           <a:noFill/>
         </p:spPr>
         <p:txBody>
-          <a:bodyPr wrap="square" lIns="0" rIns="0" tIns="0" bIns="0">
+          <a:bodyPr wrap="square">
             <a:spAutoFit/>
           </a:bodyPr>
           <a:lstStyle/>
@@ -3167,7 +3167,7 @@
                 </a:solidFill>
                 <a:latin typeface="Garamond"/>
               </a:rPr>
-              <a:t>We build one of the longest continuous measures of teacher attrition in the United States: twenty-eight consecutive years, 1998–2025.</a:t>
+              <a:t>We build one of the longest continuous measures of teacher attrition in the United States, twenty-eight consecutive years (1998–2025).</a:t>
             </a:r>
           </a:p>
         </p:txBody>
@@ -3180,7 +3180,7 @@
         </p:nvSpPr>
         <p:spPr>
           <a:xfrm>
-            <a:off x="822960" y="2743200"/>
+            <a:off x="822960" y="2880360"/>
             <a:ext cx="10789920" cy="914400"/>
           </a:xfrm>
           <a:prstGeom prst="rect">
@@ -3189,21 +3189,21 @@
           <a:noFill/>
         </p:spPr>
         <p:txBody>
-          <a:bodyPr wrap="square" lIns="0" rIns="0" tIns="0" bIns="0">
+          <a:bodyPr wrap="square">
             <a:spAutoFit/>
           </a:bodyPr>
           <a:lstStyle/>
           <a:p>
             <a:pPr>
               <a:lnSpc>
-                <a:spcPts val="2730"/>
+                <a:spcPts val="2600"/>
               </a:lnSpc>
               <a:spcAft>
-                <a:spcPts val="2800"/>
+                <a:spcPts val="2600"/>
               </a:spcAft>
             </a:pPr>
             <a:r>
-              <a:rPr sz="2100" b="1">
+              <a:rPr sz="2000" b="1">
                 <a:solidFill>
                   <a:srgbClr val="2D6CB5"/>
                 </a:solidFill>
@@ -3212,7 +3212,7 @@
               <a:t>▪  </a:t>
             </a:r>
             <a:r>
-              <a:rPr sz="2100" b="1">
+              <a:rPr sz="2000" b="1">
                 <a:solidFill>
                   <a:srgbClr val="102D5E"/>
                 </a:solidFill>
@@ -3221,26 +3221,26 @@
               <a:t>One source.  </a:t>
             </a:r>
             <a:r>
-              <a:rPr sz="2100" b="0">
+              <a:rPr sz="2000" b="0">
                 <a:solidFill>
                   <a:srgbClr val="212529"/>
                 </a:solidFill>
                 <a:latin typeface="Garamond"/>
               </a:rPr>
-              <a:t>Every number comes from the same instrument — the CPS March supplement — under a single definition, with no splicing of surveys.</a:t>
+              <a:t>A single instrument and a single definition over the whole period.</a:t>
             </a:r>
           </a:p>
           <a:p>
             <a:pPr>
               <a:lnSpc>
-                <a:spcPts val="2730"/>
+                <a:spcPts val="2600"/>
               </a:lnSpc>
               <a:spcAft>
-                <a:spcPts val="2800"/>
+                <a:spcPts val="2600"/>
               </a:spcAft>
             </a:pPr>
             <a:r>
-              <a:rPr sz="2100" b="1">
+              <a:rPr sz="2000" b="1">
                 <a:solidFill>
                   <a:srgbClr val="2D6CB5"/>
                 </a:solidFill>
@@ -3249,7 +3249,7 @@
               <a:t>▪  </a:t>
             </a:r>
             <a:r>
-              <a:rPr sz="2100" b="1">
+              <a:rPr sz="2000" b="1">
                 <a:solidFill>
                   <a:srgbClr val="102D5E"/>
                 </a:solidFill>
@@ -3258,26 +3258,26 @@
               <a:t>No gaps.  </a:t>
             </a:r>
             <a:r>
-              <a:rPr sz="2100" b="0">
+              <a:rPr sz="2000" b="0">
                 <a:solidFill>
                   <a:srgbClr val="212529"/>
                 </a:solidFill>
                 <a:latin typeface="Garamond"/>
               </a:rPr>
-              <a:t>Twenty-eight consecutive annual observations; the official benchmark measures once every four or more years.</a:t>
+              <a:t>Twenty-eight consecutive years against a quadrennial official benchmark.</a:t>
             </a:r>
           </a:p>
           <a:p>
             <a:pPr>
               <a:lnSpc>
-                <a:spcPts val="2730"/>
+                <a:spcPts val="2600"/>
               </a:lnSpc>
               <a:spcAft>
-                <a:spcPts val="2800"/>
+                <a:spcPts val="2600"/>
               </a:spcAft>
             </a:pPr>
             <a:r>
-              <a:rPr sz="2100" b="1">
+              <a:rPr sz="2000" b="1">
                 <a:solidFill>
                   <a:srgbClr val="2D6CB5"/>
                 </a:solidFill>
@@ -3286,7 +3286,7 @@
               <a:t>▪  </a:t>
             </a:r>
             <a:r>
-              <a:rPr sz="2100" b="1">
+              <a:rPr sz="2000" b="1">
                 <a:solidFill>
                   <a:srgbClr val="102D5E"/>
                 </a:solidFill>
@@ -3295,13 +3295,13 @@
               <a:t>Beyond the rate.  </a:t>
             </a:r>
             <a:r>
-              <a:rPr sz="2100" b="0">
+              <a:rPr sz="2000" b="0">
                 <a:solidFill>
                   <a:srgbClr val="212529"/>
                 </a:solidFill>
                 <a:latin typeface="Garamond"/>
               </a:rPr>
-              <a:t>The same files show who leaves, where they go, what leaving pays, who returns, and what moves the rate.</a:t>
+              <a:t>Who leaves, where they go, and what leaving pays.</a:t>
             </a:r>
           </a:p>
         </p:txBody>
